--- a/신뢰구간 임용고시 2009.pptx
+++ b/신뢰구간 임용고시 2009.pptx
@@ -14,11 +14,12 @@
     <p:sldId id="271" r:id="rId8"/>
     <p:sldId id="272" r:id="rId9"/>
     <p:sldId id="273" r:id="rId10"/>
-    <p:sldId id="268" r:id="rId11"/>
-    <p:sldId id="274" r:id="rId12"/>
-    <p:sldId id="275" r:id="rId13"/>
-    <p:sldId id="276" r:id="rId14"/>
-    <p:sldId id="277" r:id="rId15"/>
+    <p:sldId id="277" r:id="rId11"/>
+    <p:sldId id="278" r:id="rId12"/>
+    <p:sldId id="279" r:id="rId13"/>
+    <p:sldId id="280" r:id="rId14"/>
+    <p:sldId id="281" r:id="rId15"/>
+    <p:sldId id="282" r:id="rId16"/>
   </p:sldIdLst>
   <p:sldSz cx="12192000" cy="6858000"/>
   <p:notesSz cx="6858000" cy="9144000"/>
@@ -256,7 +257,7 @@
           <a:p>
             <a:fld id="{5B3AD1D6-AE87-C841-B3FD-7C9F7FCAE5AE}" type="datetimeFigureOut">
               <a:rPr lang="en-US" smtClean="0"/>
-              <a:t>12/15/19</a:t>
+              <a:t>12/17/19</a:t>
             </a:fld>
             <a:endParaRPr lang="en-US"/>
           </a:p>
@@ -426,7 +427,7 @@
           <a:p>
             <a:fld id="{5B3AD1D6-AE87-C841-B3FD-7C9F7FCAE5AE}" type="datetimeFigureOut">
               <a:rPr lang="en-US" smtClean="0"/>
-              <a:t>12/15/19</a:t>
+              <a:t>12/17/19</a:t>
             </a:fld>
             <a:endParaRPr lang="en-US"/>
           </a:p>
@@ -606,7 +607,7 @@
           <a:p>
             <a:fld id="{5B3AD1D6-AE87-C841-B3FD-7C9F7FCAE5AE}" type="datetimeFigureOut">
               <a:rPr lang="en-US" smtClean="0"/>
-              <a:t>12/15/19</a:t>
+              <a:t>12/17/19</a:t>
             </a:fld>
             <a:endParaRPr lang="en-US"/>
           </a:p>
@@ -776,7 +777,7 @@
           <a:p>
             <a:fld id="{5B3AD1D6-AE87-C841-B3FD-7C9F7FCAE5AE}" type="datetimeFigureOut">
               <a:rPr lang="en-US" smtClean="0"/>
-              <a:t>12/15/19</a:t>
+              <a:t>12/17/19</a:t>
             </a:fld>
             <a:endParaRPr lang="en-US"/>
           </a:p>
@@ -1022,7 +1023,7 @@
           <a:p>
             <a:fld id="{5B3AD1D6-AE87-C841-B3FD-7C9F7FCAE5AE}" type="datetimeFigureOut">
               <a:rPr lang="en-US" smtClean="0"/>
-              <a:t>12/15/19</a:t>
+              <a:t>12/17/19</a:t>
             </a:fld>
             <a:endParaRPr lang="en-US"/>
           </a:p>
@@ -1254,7 +1255,7 @@
           <a:p>
             <a:fld id="{5B3AD1D6-AE87-C841-B3FD-7C9F7FCAE5AE}" type="datetimeFigureOut">
               <a:rPr lang="en-US" smtClean="0"/>
-              <a:t>12/15/19</a:t>
+              <a:t>12/17/19</a:t>
             </a:fld>
             <a:endParaRPr lang="en-US"/>
           </a:p>
@@ -1621,7 +1622,7 @@
           <a:p>
             <a:fld id="{5B3AD1D6-AE87-C841-B3FD-7C9F7FCAE5AE}" type="datetimeFigureOut">
               <a:rPr lang="en-US" smtClean="0"/>
-              <a:t>12/15/19</a:t>
+              <a:t>12/17/19</a:t>
             </a:fld>
             <a:endParaRPr lang="en-US"/>
           </a:p>
@@ -1739,7 +1740,7 @@
           <a:p>
             <a:fld id="{5B3AD1D6-AE87-C841-B3FD-7C9F7FCAE5AE}" type="datetimeFigureOut">
               <a:rPr lang="en-US" smtClean="0"/>
-              <a:t>12/15/19</a:t>
+              <a:t>12/17/19</a:t>
             </a:fld>
             <a:endParaRPr lang="en-US"/>
           </a:p>
@@ -1834,7 +1835,7 @@
           <a:p>
             <a:fld id="{5B3AD1D6-AE87-C841-B3FD-7C9F7FCAE5AE}" type="datetimeFigureOut">
               <a:rPr lang="en-US" smtClean="0"/>
-              <a:t>12/15/19</a:t>
+              <a:t>12/17/19</a:t>
             </a:fld>
             <a:endParaRPr lang="en-US"/>
           </a:p>
@@ -2111,7 +2112,7 @@
           <a:p>
             <a:fld id="{5B3AD1D6-AE87-C841-B3FD-7C9F7FCAE5AE}" type="datetimeFigureOut">
               <a:rPr lang="en-US" smtClean="0"/>
-              <a:t>12/15/19</a:t>
+              <a:t>12/17/19</a:t>
             </a:fld>
             <a:endParaRPr lang="en-US"/>
           </a:p>
@@ -2364,7 +2365,7 @@
           <a:p>
             <a:fld id="{5B3AD1D6-AE87-C841-B3FD-7C9F7FCAE5AE}" type="datetimeFigureOut">
               <a:rPr lang="en-US" smtClean="0"/>
-              <a:t>12/15/19</a:t>
+              <a:t>12/17/19</a:t>
             </a:fld>
             <a:endParaRPr lang="en-US"/>
           </a:p>
@@ -2577,7 +2578,7 @@
           <a:p>
             <a:fld id="{5B3AD1D6-AE87-C841-B3FD-7C9F7FCAE5AE}" type="datetimeFigureOut">
               <a:rPr lang="en-US" smtClean="0"/>
-              <a:t>12/15/19</a:t>
+              <a:t>12/17/19</a:t>
             </a:fld>
             <a:endParaRPr lang="en-US"/>
           </a:p>
@@ -3220,7 +3221,7 @@
                 <a:ea typeface="Arial Black" charset="0"/>
                 <a:cs typeface="Arial Black" charset="0"/>
               </a:rPr>
-              <a:t/>
+              <a:t>2009</a:t>
             </a:r>
             <a:br>
               <a:rPr lang="en-US" sz="6700" dirty="0" smtClean="0">
@@ -3273,6 +3274,13 @@
   <p:clrMapOvr>
     <a:masterClrMapping/>
   </p:clrMapOvr>
+  <p:timing>
+    <p:tnLst>
+      <p:par>
+        <p:cTn id="1" dur="indefinite" restart="never" nodeType="tmRoot"/>
+      </p:par>
+    </p:tnLst>
+  </p:timing>
 </p:sld>
 </file>
 
@@ -3345,8 +3353,8 @@
         </p:blipFill>
         <p:spPr>
           <a:xfrm>
-            <a:off x="854916" y="2849880"/>
-            <a:ext cx="10390728" cy="3622040"/>
+            <a:off x="1587056" y="2849880"/>
+            <a:ext cx="8926448" cy="3622040"/>
           </a:xfrm>
           <a:prstGeom prst="rect">
             <a:avLst/>
@@ -3375,8 +3383,8 @@
         </p:blipFill>
         <p:spPr>
           <a:xfrm>
-            <a:off x="854916" y="3111500"/>
-            <a:ext cx="10390728" cy="3360420"/>
+            <a:off x="822960" y="2895600"/>
+            <a:ext cx="10713720" cy="3576320"/>
           </a:xfrm>
           <a:prstGeom prst="rect">
             <a:avLst/>
@@ -3386,13 +3394,20 @@
     </p:spTree>
     <p:extLst>
       <p:ext uri="{BB962C8B-B14F-4D97-AF65-F5344CB8AC3E}">
-        <p14:creationId xmlns:p14="http://schemas.microsoft.com/office/powerpoint/2010/main" val="1644020188"/>
+        <p14:creationId xmlns:p14="http://schemas.microsoft.com/office/powerpoint/2010/main" val="271183181"/>
       </p:ext>
     </p:extLst>
   </p:cSld>
   <p:clrMapOvr>
     <a:masterClrMapping/>
   </p:clrMapOvr>
+  <p:timing>
+    <p:tnLst>
+      <p:par>
+        <p:cTn id="1" dur="indefinite" restart="never" nodeType="tmRoot"/>
+      </p:par>
+    </p:tnLst>
+  </p:timing>
 </p:sld>
 </file>
 
@@ -3465,8 +3480,8 @@
         </p:blipFill>
         <p:spPr>
           <a:xfrm>
-            <a:off x="854916" y="2849880"/>
-            <a:ext cx="10390728" cy="3622040"/>
+            <a:off x="1587056" y="2849880"/>
+            <a:ext cx="8926448" cy="3622040"/>
           </a:xfrm>
           <a:prstGeom prst="rect">
             <a:avLst/>
@@ -3495,8 +3510,8 @@
         </p:blipFill>
         <p:spPr>
           <a:xfrm>
-            <a:off x="854916" y="3855720"/>
-            <a:ext cx="10390728" cy="2616200"/>
+            <a:off x="822960" y="3566160"/>
+            <a:ext cx="10713720" cy="2905760"/>
           </a:xfrm>
           <a:prstGeom prst="rect">
             <a:avLst/>
@@ -3506,13 +3521,20 @@
     </p:spTree>
     <p:extLst>
       <p:ext uri="{BB962C8B-B14F-4D97-AF65-F5344CB8AC3E}">
-        <p14:creationId xmlns:p14="http://schemas.microsoft.com/office/powerpoint/2010/main" val="1075040245"/>
+        <p14:creationId xmlns:p14="http://schemas.microsoft.com/office/powerpoint/2010/main" val="1714584119"/>
       </p:ext>
     </p:extLst>
   </p:cSld>
   <p:clrMapOvr>
     <a:masterClrMapping/>
   </p:clrMapOvr>
+  <p:timing>
+    <p:tnLst>
+      <p:par>
+        <p:cTn id="1" dur="indefinite" restart="never" nodeType="tmRoot"/>
+      </p:par>
+    </p:tnLst>
+  </p:timing>
 </p:sld>
 </file>
 
@@ -3585,8 +3607,8 @@
         </p:blipFill>
         <p:spPr>
           <a:xfrm>
-            <a:off x="854916" y="2849880"/>
-            <a:ext cx="10390728" cy="3622040"/>
+            <a:off x="1587056" y="2849880"/>
+            <a:ext cx="8926448" cy="3622040"/>
           </a:xfrm>
           <a:prstGeom prst="rect">
             <a:avLst/>
@@ -3615,8 +3637,8 @@
         </p:blipFill>
         <p:spPr>
           <a:xfrm>
-            <a:off x="854916" y="5029200"/>
-            <a:ext cx="10390728" cy="1442720"/>
+            <a:off x="822960" y="4541520"/>
+            <a:ext cx="10713720" cy="1930400"/>
           </a:xfrm>
           <a:prstGeom prst="rect">
             <a:avLst/>
@@ -3626,13 +3648,20 @@
     </p:spTree>
     <p:extLst>
       <p:ext uri="{BB962C8B-B14F-4D97-AF65-F5344CB8AC3E}">
-        <p14:creationId xmlns:p14="http://schemas.microsoft.com/office/powerpoint/2010/main" val="493949483"/>
+        <p14:creationId xmlns:p14="http://schemas.microsoft.com/office/powerpoint/2010/main" val="2028551233"/>
       </p:ext>
     </p:extLst>
   </p:cSld>
   <p:clrMapOvr>
     <a:masterClrMapping/>
   </p:clrMapOvr>
+  <p:timing>
+    <p:tnLst>
+      <p:par>
+        <p:cTn id="1" dur="indefinite" restart="never" nodeType="tmRoot"/>
+      </p:par>
+    </p:tnLst>
+  </p:timing>
 </p:sld>
 </file>
 
@@ -3705,8 +3734,8 @@
         </p:blipFill>
         <p:spPr>
           <a:xfrm>
-            <a:off x="854916" y="2849880"/>
-            <a:ext cx="10390728" cy="3622040"/>
+            <a:off x="1587056" y="2849880"/>
+            <a:ext cx="8926448" cy="3622040"/>
           </a:xfrm>
           <a:prstGeom prst="rect">
             <a:avLst/>
@@ -3735,8 +3764,8 @@
         </p:blipFill>
         <p:spPr>
           <a:xfrm>
-            <a:off x="854916" y="5608320"/>
-            <a:ext cx="10390728" cy="863600"/>
+            <a:off x="822960" y="5227320"/>
+            <a:ext cx="10713720" cy="1244600"/>
           </a:xfrm>
           <a:prstGeom prst="rect">
             <a:avLst/>
@@ -3746,13 +3775,20 @@
     </p:spTree>
     <p:extLst>
       <p:ext uri="{BB962C8B-B14F-4D97-AF65-F5344CB8AC3E}">
-        <p14:creationId xmlns:p14="http://schemas.microsoft.com/office/powerpoint/2010/main" val="625687315"/>
+        <p14:creationId xmlns:p14="http://schemas.microsoft.com/office/powerpoint/2010/main" val="1320900824"/>
       </p:ext>
     </p:extLst>
   </p:cSld>
   <p:clrMapOvr>
     <a:masterClrMapping/>
   </p:clrMapOvr>
+  <p:timing>
+    <p:tnLst>
+      <p:par>
+        <p:cTn id="1" dur="indefinite" restart="never" nodeType="tmRoot"/>
+      </p:par>
+    </p:tnLst>
+  </p:timing>
 </p:sld>
 </file>
 
@@ -3825,8 +3861,38 @@
         </p:blipFill>
         <p:spPr>
           <a:xfrm>
-            <a:off x="854916" y="2849880"/>
-            <a:ext cx="10390728" cy="3622040"/>
+            <a:off x="1587056" y="2849880"/>
+            <a:ext cx="8926448" cy="3622040"/>
+          </a:xfrm>
+          <a:prstGeom prst="rect">
+            <a:avLst/>
+          </a:prstGeom>
+        </p:spPr>
+      </p:pic>
+      <p:pic>
+        <p:nvPicPr>
+          <p:cNvPr id="4" name="Picture 3"/>
+          <p:cNvPicPr>
+            <a:picLocks noChangeAspect="1"/>
+          </p:cNvPicPr>
+          <p:nvPr/>
+        </p:nvPicPr>
+        <p:blipFill>
+          <a:blip r:embed="rId4">
+            <a:extLst>
+              <a:ext uri="{28A0092B-C50C-407E-A947-70E740481C1C}">
+                <a14:useLocalDpi xmlns:a14="http://schemas.microsoft.com/office/drawing/2010/main" val="0"/>
+              </a:ext>
+            </a:extLst>
+          </a:blip>
+          <a:stretch>
+            <a:fillRect/>
+          </a:stretch>
+        </p:blipFill>
+        <p:spPr>
+          <a:xfrm>
+            <a:off x="822960" y="5806440"/>
+            <a:ext cx="10713720" cy="665480"/>
           </a:xfrm>
           <a:prstGeom prst="rect">
             <a:avLst/>
@@ -3836,13 +3902,117 @@
     </p:spTree>
     <p:extLst>
       <p:ext uri="{BB962C8B-B14F-4D97-AF65-F5344CB8AC3E}">
-        <p14:creationId xmlns:p14="http://schemas.microsoft.com/office/powerpoint/2010/main" val="271183181"/>
+        <p14:creationId xmlns:p14="http://schemas.microsoft.com/office/powerpoint/2010/main" val="1800116251"/>
       </p:ext>
     </p:extLst>
   </p:cSld>
   <p:clrMapOvr>
     <a:masterClrMapping/>
   </p:clrMapOvr>
+  <p:timing>
+    <p:tnLst>
+      <p:par>
+        <p:cTn id="1" dur="indefinite" restart="never" nodeType="tmRoot"/>
+      </p:par>
+    </p:tnLst>
+  </p:timing>
+</p:sld>
+</file>
+
+<file path=ppt/slides/slide15.xml><?xml version="1.0" encoding="utf-8"?>
+<p:sld xmlns:a="http://schemas.openxmlformats.org/drawingml/2006/main" xmlns:r="http://schemas.openxmlformats.org/officeDocument/2006/relationships" xmlns:p="http://schemas.openxmlformats.org/presentationml/2006/main">
+  <p:cSld>
+    <p:spTree>
+      <p:nvGrpSpPr>
+        <p:cNvPr id="1" name=""/>
+        <p:cNvGrpSpPr/>
+        <p:nvPr/>
+      </p:nvGrpSpPr>
+      <p:grpSpPr>
+        <a:xfrm>
+          <a:off x="0" y="0"/>
+          <a:ext cx="0" cy="0"/>
+          <a:chOff x="0" y="0"/>
+          <a:chExt cx="0" cy="0"/>
+        </a:xfrm>
+      </p:grpSpPr>
+      <p:pic>
+        <p:nvPicPr>
+          <p:cNvPr id="2" name="Picture 1"/>
+          <p:cNvPicPr>
+            <a:picLocks noChangeAspect="1"/>
+          </p:cNvPicPr>
+          <p:nvPr/>
+        </p:nvPicPr>
+        <p:blipFill>
+          <a:blip r:embed="rId2">
+            <a:extLst>
+              <a:ext uri="{28A0092B-C50C-407E-A947-70E740481C1C}">
+                <a14:useLocalDpi xmlns:a14="http://schemas.microsoft.com/office/drawing/2010/main" val="0"/>
+              </a:ext>
+            </a:extLst>
+          </a:blip>
+          <a:stretch>
+            <a:fillRect/>
+          </a:stretch>
+        </p:blipFill>
+        <p:spPr>
+          <a:xfrm>
+            <a:off x="1224788" y="922020"/>
+            <a:ext cx="9650984" cy="1348740"/>
+          </a:xfrm>
+          <a:prstGeom prst="rect">
+            <a:avLst/>
+          </a:prstGeom>
+        </p:spPr>
+      </p:pic>
+      <p:pic>
+        <p:nvPicPr>
+          <p:cNvPr id="3" name="Picture 2"/>
+          <p:cNvPicPr>
+            <a:picLocks noChangeAspect="1"/>
+          </p:cNvPicPr>
+          <p:nvPr/>
+        </p:nvPicPr>
+        <p:blipFill>
+          <a:blip r:embed="rId3">
+            <a:extLst>
+              <a:ext uri="{28A0092B-C50C-407E-A947-70E740481C1C}">
+                <a14:useLocalDpi xmlns:a14="http://schemas.microsoft.com/office/drawing/2010/main" val="0"/>
+              </a:ext>
+            </a:extLst>
+          </a:blip>
+          <a:stretch>
+            <a:fillRect/>
+          </a:stretch>
+        </p:blipFill>
+        <p:spPr>
+          <a:xfrm>
+            <a:off x="1587056" y="2849880"/>
+            <a:ext cx="8926448" cy="3622040"/>
+          </a:xfrm>
+          <a:prstGeom prst="rect">
+            <a:avLst/>
+          </a:prstGeom>
+        </p:spPr>
+      </p:pic>
+    </p:spTree>
+    <p:extLst>
+      <p:ext uri="{BB962C8B-B14F-4D97-AF65-F5344CB8AC3E}">
+        <p14:creationId xmlns:p14="http://schemas.microsoft.com/office/powerpoint/2010/main" val="1688052707"/>
+      </p:ext>
+    </p:extLst>
+  </p:cSld>
+  <p:clrMapOvr>
+    <a:masterClrMapping/>
+  </p:clrMapOvr>
+  <p:timing>
+    <p:tnLst>
+      <p:par>
+        <p:cTn id="1" dur="indefinite" restart="never" nodeType="tmRoot"/>
+      </p:par>
+    </p:tnLst>
+  </p:timing>
 </p:sld>
 </file>
 
@@ -4098,6 +4268,13 @@
   <p:clrMapOvr>
     <a:masterClrMapping/>
   </p:clrMapOvr>
+  <p:timing>
+    <p:tnLst>
+      <p:par>
+        <p:cTn id="1" dur="indefinite" restart="never" nodeType="tmRoot"/>
+      </p:par>
+    </p:tnLst>
+  </p:timing>
 </p:sld>
 </file>
 
@@ -4218,6 +4395,13 @@
   <p:clrMapOvr>
     <a:masterClrMapping/>
   </p:clrMapOvr>
+  <p:timing>
+    <p:tnLst>
+      <p:par>
+        <p:cTn id="1" dur="indefinite" restart="never" nodeType="tmRoot"/>
+      </p:par>
+    </p:tnLst>
+  </p:timing>
 </p:sld>
 </file>
 
@@ -4338,6 +4522,13 @@
   <p:clrMapOvr>
     <a:masterClrMapping/>
   </p:clrMapOvr>
+  <p:timing>
+    <p:tnLst>
+      <p:par>
+        <p:cTn id="1" dur="indefinite" restart="never" nodeType="tmRoot"/>
+      </p:par>
+    </p:tnLst>
+  </p:timing>
 </p:sld>
 </file>
 
@@ -4458,6 +4649,13 @@
   <p:clrMapOvr>
     <a:masterClrMapping/>
   </p:clrMapOvr>
+  <p:timing>
+    <p:tnLst>
+      <p:par>
+        <p:cTn id="1" dur="indefinite" restart="never" nodeType="tmRoot"/>
+      </p:par>
+    </p:tnLst>
+  </p:timing>
 </p:sld>
 </file>
 
@@ -4578,6 +4776,13 @@
   <p:clrMapOvr>
     <a:masterClrMapping/>
   </p:clrMapOvr>
+  <p:timing>
+    <p:tnLst>
+      <p:par>
+        <p:cTn id="1" dur="indefinite" restart="never" nodeType="tmRoot"/>
+      </p:par>
+    </p:tnLst>
+  </p:timing>
 </p:sld>
 </file>
 
@@ -4698,6 +4903,13 @@
   <p:clrMapOvr>
     <a:masterClrMapping/>
   </p:clrMapOvr>
+  <p:timing>
+    <p:tnLst>
+      <p:par>
+        <p:cTn id="1" dur="indefinite" restart="never" nodeType="tmRoot"/>
+      </p:par>
+    </p:tnLst>
+  </p:timing>
 </p:sld>
 </file>
 
@@ -4788,6 +5000,13 @@
   <p:clrMapOvr>
     <a:masterClrMapping/>
   </p:clrMapOvr>
+  <p:timing>
+    <p:tnLst>
+      <p:par>
+        <p:cTn id="1" dur="indefinite" restart="never" nodeType="tmRoot"/>
+      </p:par>
+    </p:tnLst>
+  </p:timing>
 </p:sld>
 </file>
 
